--- a/assets/powerpoints/module-vetements/A4-dans-le-magasin.pptx
+++ b/assets/powerpoints/module-vetements/A4-dans-le-magasin.pptx
@@ -10553,7 +10553,61 @@
                 </a:solidFill>
                 <a:latin typeface="Verdana"/>
               </a:rPr>
-              <a:t>La &lt;b&gt;facture&lt;/b&gt; prouve la date d'achat. Les &lt;b&gt;étiquettes&lt;/b&gt; attachées prouvent que l'article n'a pas été porté. La &lt;b&gt;boîte&lt;/b&gt; est souvent exigée pour des chaussures. Sans ces trois-là, un échange devient difficile ou impossible.</a:t>
+              <a:t>La </a:t>
+            </a:r>
+            <a:r>
+              <a:rPr sz="2000" b="1" i="0">
+                <a:solidFill>
+                  <a:srgbClr val="4B4F52"/>
+                </a:solidFill>
+                <a:latin typeface="Verdana"/>
+              </a:rPr>
+              <a:t>facture</a:t>
+            </a:r>
+            <a:r>
+              <a:rPr sz="2000" b="0" i="0">
+                <a:solidFill>
+                  <a:srgbClr val="4B4F52"/>
+                </a:solidFill>
+                <a:latin typeface="Verdana"/>
+              </a:rPr>
+              <a:t> prouve la date d'achat. Les </a:t>
+            </a:r>
+            <a:r>
+              <a:rPr sz="2000" b="1" i="0">
+                <a:solidFill>
+                  <a:srgbClr val="4B4F52"/>
+                </a:solidFill>
+                <a:latin typeface="Verdana"/>
+              </a:rPr>
+              <a:t>étiquettes</a:t>
+            </a:r>
+            <a:r>
+              <a:rPr sz="2000" b="0" i="0">
+                <a:solidFill>
+                  <a:srgbClr val="4B4F52"/>
+                </a:solidFill>
+                <a:latin typeface="Verdana"/>
+              </a:rPr>
+              <a:t> attachées prouvent que l'article n'a pas été porté. La </a:t>
+            </a:r>
+            <a:r>
+              <a:rPr sz="2000" b="1" i="0">
+                <a:solidFill>
+                  <a:srgbClr val="4B4F52"/>
+                </a:solidFill>
+                <a:latin typeface="Verdana"/>
+              </a:rPr>
+              <a:t>boîte</a:t>
+            </a:r>
+            <a:r>
+              <a:rPr sz="2000" b="0" i="0">
+                <a:solidFill>
+                  <a:srgbClr val="4B4F52"/>
+                </a:solidFill>
+                <a:latin typeface="Verdana"/>
+              </a:rPr>
+              <a:t> est souvent exigée pour des chaussures. Sans ces trois-là, un échange devient difficile ou impossible.</a:t>
             </a:r>
           </a:p>
         </p:txBody>
